--- a/AI_as_Architecture_with_Harness_Update.pptx
+++ b/AI_as_Architecture_with_Harness_Update.pptx
@@ -4,6 +4,9 @@
   <p:sldMasterIdLst>
     <p:sldMasterId id="2147483648" r:id="rId1"/>
   </p:sldMasterIdLst>
+  <p:notesMasterIdLst>
+    <p:notesMasterId r:id="rId8"/>
+  </p:notesMasterIdLst>
   <p:sldIdLst>
     <p:sldId id="256" r:id="rId2"/>
     <p:sldId id="257" r:id="rId3"/>
@@ -12,9 +15,6 @@
     <p:sldId id="260" r:id="rId6"/>
     <p:sldId id="261" r:id="rId7"/>
   </p:sldIdLst>
-  <p:notesMasterIdLst>
-    <p:notesMasterId r:id="rId8"/>
-  </p:notesMasterIdLst>
   <p:sldSz cx="12192000" cy="6858000"/>
   <p:notesSz cx="6858000" cy="12192000"/>
   <p:defaultTextStyle>
@@ -109,6 +109,11 @@
       </a:defRPr>
     </a:lvl9pPr>
   </p:defaultTextStyle>
+  <p:extLst>
+    <p:ext uri="{EFAFB233-063F-42B5-8137-9DF3F51BA10A}">
+      <p15:sldGuideLst xmlns:p15="http://schemas.microsoft.com/office/powerpoint/2012/main"/>
+    </p:ext>
+  </p:extLst>
 </p:presentation>
 </file>
 
@@ -134,234 +139,10 @@
           <a:chExt cx="0" cy="0"/>
         </a:xfrm>
       </p:grpSpPr>
-      <p:sp>
-        <p:nvSpPr>
-          <p:cNvPr id="2" name="Header Placeholder 1"/>
-          <p:cNvSpPr>
-            <a:spLocks noGrp="1"/>
-          </p:cNvSpPr>
-          <p:nvPr>
-            <p:ph type="hdr" sz="quarter"/>
-          </p:nvPr>
-        </p:nvSpPr>
-        <p:spPr>
-          <a:xfrm>
-            <a:off x="0" y="0"/>
-            <a:ext cx="2971800" cy="458788"/>
-          </a:xfrm>
-          <a:prstGeom prst="rect">
-            <a:avLst/>
-          </a:prstGeom>
-        </p:spPr>
-        <p:txBody>
-          <a:bodyPr vert="horz" lIns="91440" tIns="45720" rIns="91440" bIns="45720" rtlCol="0"/>
-          <a:lstStyle>
-            <a:lvl1pPr algn="l">
-              <a:defRPr sz="1200"/>
-            </a:lvl1pPr>
-          </a:lstStyle>
-          <a:p>
-            <a:endParaRPr lang="en-US"/>
-          </a:p>
-        </p:txBody>
-      </p:sp>
-      <p:sp>
-        <p:nvSpPr>
-          <p:cNvPr id="3" name="Date Placeholder 2"/>
-          <p:cNvSpPr>
-            <a:spLocks noGrp="1"/>
-          </p:cNvSpPr>
-          <p:nvPr>
-            <p:ph type="dt" idx="1"/>
-          </p:nvPr>
-        </p:nvSpPr>
-        <p:spPr>
-          <a:xfrm>
-            <a:off x="3884613" y="0"/>
-            <a:ext cx="2971800" cy="458788"/>
-          </a:xfrm>
-          <a:prstGeom prst="rect">
-            <a:avLst/>
-          </a:prstGeom>
-        </p:spPr>
-        <p:txBody>
-          <a:bodyPr vert="horz" lIns="91440" tIns="45720" rIns="91440" bIns="45720" rtlCol="0"/>
-          <a:lstStyle>
-            <a:lvl1pPr algn="r">
-              <a:defRPr sz="1200"/>
-            </a:lvl1pPr>
-          </a:lstStyle>
-          <a:p>
-            <a:fld id="{5282F153-3F37-0F45-9E97-73ACFA13230C}" type="datetimeFigureOut">
-              <a:rPr lang="en-US"/>
-              <a:t>7/23/19</a:t>
-            </a:fld>
-            <a:endParaRPr lang="en-US"/>
-          </a:p>
-        </p:txBody>
-      </p:sp>
-      <p:sp>
-        <p:nvSpPr>
-          <p:cNvPr id="4" name="Slide Image Placeholder 3"/>
-          <p:cNvSpPr>
-            <a:spLocks noGrp="1" noRot="1" noChangeAspect="1"/>
-          </p:cNvSpPr>
-          <p:nvPr>
-            <p:ph type="sldImg" idx="2"/>
-          </p:nvPr>
-        </p:nvSpPr>
-        <p:spPr>
-          <a:xfrm>
-            <a:off x="685800" y="1143000"/>
-            <a:ext cx="5486400" cy="3086100"/>
-          </a:xfrm>
-          <a:prstGeom prst="rect">
-            <a:avLst/>
-          </a:prstGeom>
-          <a:noFill/>
-          <a:ln w="12700">
-            <a:solidFill>
-              <a:prstClr val="black"/>
-            </a:solidFill>
-          </a:ln>
-        </p:spPr>
-        <p:txBody>
-          <a:bodyPr vert="horz" lIns="91440" tIns="45720" rIns="91440" bIns="45720" rtlCol="0" anchor="ctr"/>
-          <a:lstStyle/>
-          <a:p>
-            <a:endParaRPr lang="en-US"/>
-          </a:p>
-        </p:txBody>
-      </p:sp>
-      <p:sp>
-        <p:nvSpPr>
-          <p:cNvPr id="5" name="Notes Placeholder 4"/>
-          <p:cNvSpPr>
-            <a:spLocks noGrp="1"/>
-          </p:cNvSpPr>
-          <p:nvPr>
-            <p:ph type="body" sz="quarter" idx="3"/>
-          </p:nvPr>
-        </p:nvSpPr>
-        <p:spPr>
-          <a:xfrm>
-            <a:off x="685800" y="4400550"/>
-            <a:ext cx="5486400" cy="3600450"/>
-          </a:xfrm>
-          <a:prstGeom prst="rect">
-            <a:avLst/>
-          </a:prstGeom>
-        </p:spPr>
-        <p:txBody>
-          <a:bodyPr vert="horz" lIns="91440" tIns="45720" rIns="91440" bIns="45720" rtlCol="0"/>
-          <a:lstStyle/>
-          <a:p>
-            <a:pPr lvl="0"/>
-            <a:r>
-              <a:rPr lang="en-US"/>
-              <a:t>Click to edit Master text styles</a:t>
-            </a:r>
-          </a:p>
-          <a:p>
-            <a:pPr lvl="1"/>
-            <a:r>
-              <a:rPr lang="en-US"/>
-              <a:t>Second level</a:t>
-            </a:r>
-          </a:p>
-          <a:p>
-            <a:pPr lvl="2"/>
-            <a:r>
-              <a:rPr lang="en-US"/>
-              <a:t>Third level</a:t>
-            </a:r>
-          </a:p>
-          <a:p>
-            <a:pPr lvl="3"/>
-            <a:r>
-              <a:rPr lang="en-US"/>
-              <a:t>Fourth level</a:t>
-            </a:r>
-          </a:p>
-          <a:p>
-            <a:pPr lvl="4"/>
-            <a:r>
-              <a:rPr lang="en-US"/>
-              <a:t>Fifth level</a:t>
-            </a:r>
-          </a:p>
-        </p:txBody>
-      </p:sp>
-      <p:sp>
-        <p:nvSpPr>
-          <p:cNvPr id="6" name="Footer Placeholder 5"/>
-          <p:cNvSpPr>
-            <a:spLocks noGrp="1"/>
-          </p:cNvSpPr>
-          <p:nvPr>
-            <p:ph type="ftr" sz="quarter" idx="4"/>
-          </p:nvPr>
-        </p:nvSpPr>
-        <p:spPr>
-          <a:xfrm>
-            <a:off x="0" y="8685213"/>
-            <a:ext cx="2971800" cy="458787"/>
-          </a:xfrm>
-          <a:prstGeom prst="rect">
-            <a:avLst/>
-          </a:prstGeom>
-        </p:spPr>
-        <p:txBody>
-          <a:bodyPr vert="horz" lIns="91440" tIns="45720" rIns="91440" bIns="45720" rtlCol="0" anchor="b"/>
-          <a:lstStyle>
-            <a:lvl1pPr algn="l">
-              <a:defRPr sz="1200"/>
-            </a:lvl1pPr>
-          </a:lstStyle>
-          <a:p>
-            <a:endParaRPr lang="en-US"/>
-          </a:p>
-        </p:txBody>
-      </p:sp>
-      <p:sp>
-        <p:nvSpPr>
-          <p:cNvPr id="7" name="Slide Number Placeholder 6"/>
-          <p:cNvSpPr>
-            <a:spLocks noGrp="1"/>
-          </p:cNvSpPr>
-          <p:nvPr>
-            <p:ph type="sldNum" sz="quarter" idx="5"/>
-          </p:nvPr>
-        </p:nvSpPr>
-        <p:spPr>
-          <a:xfrm>
-            <a:off x="3884613" y="8685213"/>
-            <a:ext cx="2971800" cy="458787"/>
-          </a:xfrm>
-          <a:prstGeom prst="rect">
-            <a:avLst/>
-          </a:prstGeom>
-        </p:spPr>
-        <p:txBody>
-          <a:bodyPr vert="horz" lIns="91440" tIns="45720" rIns="91440" bIns="45720" rtlCol="0" anchor="b"/>
-          <a:lstStyle>
-            <a:lvl1pPr algn="r">
-              <a:defRPr sz="1200"/>
-            </a:lvl1pPr>
-          </a:lstStyle>
-          <a:p>
-            <a:fld id="{CE5E9CC1-C706-0F49-92D6-E571CC5EEA8F}" type="slidenum">
-              <a:rPr lang="en-US"/>
-              <a:t>‹#›</a:t>
-            </a:fld>
-            <a:endParaRPr lang="en-US"/>
-          </a:p>
-        </p:txBody>
-      </p:sp>
     </p:spTree>
     <p:extLst>
       <p:ext uri="{BB962C8B-B14F-4D97-AF65-F5344CB8AC3E}">
-        <p14:creationId xmlns:p14="http://schemas.microsoft.com/office/powerpoint/2010/main" val="1024086991"/>
+        <p14:creationId xmlns:p14="http://schemas.microsoft.com/office/powerpoint/2010/main" val="1174561797"/>
       </p:ext>
     </p:extLst>
   </p:cSld>
@@ -512,7 +293,6 @@
 - Daily Dose of DS, "The Anatomy of an Agent Harness," Apr 7 2026: https://www.dailydoseofds.com/p/the-anatomy-of-an-agent-harness/
 [/Sources]</a:t>
             </a:r>
-            <a:endParaRPr lang="en-US" dirty="0"/>
           </a:p>
         </p:txBody>
       </p:sp>
@@ -602,7 +382,6 @@
 - arXiv 2604.08224: https://arxiv.org/abs/2604.08224
 [/Sources]</a:t>
             </a:r>
-            <a:endParaRPr lang="en-US" dirty="0"/>
           </a:p>
         </p:txBody>
       </p:sp>
@@ -692,7 +471,6 @@
 - Zhou et al., Externalization in LLM Agents: A Unified Review of Memory, Skills, Protocols and Harness Engineering, arXiv:2604.08224, Apr 9 2026: https://arxiv.org/abs/2604.08224
 [/Sources]</a:t>
             </a:r>
-            <a:endParaRPr lang="en-US" dirty="0"/>
           </a:p>
         </p:txBody>
       </p:sp>
@@ -782,7 +560,6 @@
 - Daily Dose of DS, "The Anatomy of an Agent Harness," Apr 7 2026: https://www.dailydoseofds.com/p/the-anatomy-of-an-agent-harness/
 [/Sources]</a:t>
             </a:r>
-            <a:endParaRPr lang="en-US" dirty="0"/>
           </a:p>
         </p:txBody>
       </p:sp>
@@ -866,10 +643,6 @@
           <a:bodyPr/>
           <a:lstStyle/>
           <a:p>
-            <a:r>
-              <a:rPr lang="en-US" dirty="0"/>
-              <a:t/>
-            </a:r>
             <a:endParaRPr lang="en-US" dirty="0"/>
           </a:p>
         </p:txBody>
@@ -961,7 +734,6 @@
 - Daily Dose of DS, "The Anatomy of an Agent Harness," Apr 7 2026: https://www.dailydoseofds.com/p/the-anatomy-of-an-agent-harness/
 [/Sources]</a:t>
             </a:r>
-            <a:endParaRPr lang="en-US" dirty="0"/>
           </a:p>
         </p:txBody>
       </p:sp>
@@ -1034,6 +806,11 @@
 <file path=ppt/slideMasters/slideMaster1.xml><?xml version="1.0" encoding="utf-8"?>
 <p:sldMaster xmlns:a="http://schemas.openxmlformats.org/drawingml/2006/main" xmlns:r="http://schemas.openxmlformats.org/officeDocument/2006/relationships" xmlns:p="http://schemas.openxmlformats.org/presentationml/2006/main">
   <p:cSld>
+    <p:bg>
+      <p:bgRef idx="1001">
+        <a:schemeClr val="bg1"/>
+      </p:bgRef>
+    </p:bg>
     <p:spTree>
       <p:nvGrpSpPr>
         <p:cNvPr id="1" name=""/>
@@ -1316,6 +1093,7 @@
         <a:solidFill>
           <a:srgbClr val="F7F9FC"/>
         </a:solidFill>
+        <a:effectLst/>
       </p:bgPr>
     </p:bg>
     <p:spTree>
@@ -1353,7 +1131,7 @@
           <a:bodyPr wrap="square" lIns="0" tIns="0" rIns="0" bIns="0" rtlCol="0" anchor="ctr"/>
           <a:lstStyle/>
           <a:p>
-            <a:pPr indent="0" marL="0">
+            <a:pPr marL="0" indent="0">
               <a:buNone/>
             </a:pPr>
             <a:r>
@@ -1392,7 +1170,7 @@
           <a:bodyPr wrap="square" lIns="0" tIns="0" rIns="0" bIns="0" rtlCol="0" anchor="ctr"/>
           <a:lstStyle/>
           <a:p>
-            <a:pPr indent="0" marL="0">
+            <a:pPr marL="0" indent="0">
               <a:buNone/>
             </a:pPr>
             <a:r>
@@ -1429,6 +1207,13 @@
             <a:prstDash val="solid"/>
           </a:ln>
         </p:spPr>
+        <p:txBody>
+          <a:bodyPr/>
+          <a:lstStyle/>
+          <a:p>
+            <a:endParaRPr lang="en-US"/>
+          </a:p>
+        </p:txBody>
       </p:sp>
       <p:sp>
         <p:nvSpPr>
@@ -1438,8 +1223,8 @@
         </p:nvSpPr>
         <p:spPr>
           <a:xfrm>
-            <a:off x="731520" y="1463040"/>
-            <a:ext cx="8046720" cy="640080"/>
+            <a:off x="548640" y="1255853"/>
+            <a:ext cx="9488926" cy="640080"/>
           </a:xfrm>
           <a:prstGeom prst="rect">
             <a:avLst/>
@@ -1451,7 +1236,7 @@
           <a:bodyPr wrap="square" lIns="0" tIns="0" rIns="0" bIns="0" rtlCol="0" anchor="ctr"/>
           <a:lstStyle/>
           <a:p>
-            <a:pPr indent="0" marL="0">
+            <a:pPr marL="0" indent="0">
               <a:buNone/>
             </a:pPr>
             <a:r>
@@ -1487,7 +1272,7 @@
           <a:bodyPr wrap="square" lIns="0" tIns="0" rIns="0" bIns="0" rtlCol="0" anchor="ctr"/>
           <a:lstStyle/>
           <a:p>
-            <a:pPr algn="l" indent="0" marL="0">
+            <a:pPr marL="0" indent="0" algn="l">
               <a:buNone/>
             </a:pPr>
             <a:r>
@@ -1498,9 +1283,6 @@
               </a:rPr>
               <a:t>AI as Interface</a:t>
             </a:r>
-            <a:pPr algn="l" indent="0" marL="0">
-              <a:buNone/>
-            </a:pPr>
             <a:r>
               <a:rPr lang="en-US" sz="2000" dirty="0">
                 <a:solidFill>
@@ -1509,9 +1291,6 @@
               </a:rPr>
               <a:t>  →  </a:t>
             </a:r>
-            <a:pPr algn="l" indent="0" marL="0">
-              <a:buNone/>
-            </a:pPr>
             <a:r>
               <a:rPr lang="en-US" sz="2000" b="1" dirty="0">
                 <a:solidFill>
@@ -1520,9 +1299,6 @@
               </a:rPr>
               <a:t>AI as Feature</a:t>
             </a:r>
-            <a:pPr algn="l" indent="0" marL="0">
-              <a:buNone/>
-            </a:pPr>
             <a:r>
               <a:rPr lang="en-US" sz="2000" dirty="0">
                 <a:solidFill>
@@ -1531,9 +1307,6 @@
               </a:rPr>
               <a:t>  →  </a:t>
             </a:r>
-            <a:pPr algn="l" indent="0" marL="0">
-              <a:buNone/>
-            </a:pPr>
             <a:r>
               <a:rPr lang="en-US" sz="2000" b="1" dirty="0">
                 <a:solidFill>
@@ -1567,7 +1340,7 @@
           <a:bodyPr wrap="square" lIns="254" tIns="254" rIns="254" bIns="254" rtlCol="0" anchor="ctr"/>
           <a:lstStyle/>
           <a:p>
-            <a:pPr indent="0" marL="0">
+            <a:pPr marL="0" indent="0">
               <a:buNone/>
             </a:pPr>
             <a:r>
@@ -1590,7 +1363,7 @@
         </p:nvSpPr>
         <p:spPr>
           <a:xfrm>
-            <a:off x="7726680" y="1600200"/>
+            <a:off x="7861717" y="1920240"/>
             <a:ext cx="3383280" cy="3474720"/>
           </a:xfrm>
           <a:prstGeom prst="roundRect">
@@ -1608,6 +1381,13 @@
             <a:prstDash val="solid"/>
           </a:ln>
         </p:spPr>
+        <p:txBody>
+          <a:bodyPr/>
+          <a:lstStyle/>
+          <a:p>
+            <a:endParaRPr lang="en-US"/>
+          </a:p>
+        </p:txBody>
       </p:sp>
       <p:sp>
         <p:nvSpPr>
@@ -1617,7 +1397,7 @@
         </p:nvSpPr>
         <p:spPr>
           <a:xfrm>
-            <a:off x="8092440" y="2011680"/>
+            <a:off x="8266060" y="2466951"/>
             <a:ext cx="2651760" cy="2468880"/>
           </a:xfrm>
           <a:prstGeom prst="rect">
@@ -1630,7 +1410,7 @@
           <a:bodyPr wrap="square" rtlCol="0" anchor="ctr"/>
           <a:lstStyle/>
           <a:p>
-            <a:pPr algn="ctr" indent="0" marL="0">
+            <a:pPr marL="0" indent="0" algn="ctr">
               <a:buNone/>
             </a:pPr>
             <a:r>
@@ -1644,13 +1424,13 @@
             <a:endParaRPr lang="en-US" sz="2300" dirty="0"/>
           </a:p>
           <a:p>
-            <a:pPr algn="ctr" indent="0" marL="0">
+            <a:pPr marL="0" indent="0" algn="ctr">
               <a:buNone/>
             </a:pPr>
             <a:endParaRPr lang="en-US" sz="2300" dirty="0"/>
           </a:p>
           <a:p>
-            <a:pPr algn="ctr" indent="0" marL="0">
+            <a:pPr marL="0" indent="0" algn="ctr">
               <a:buNone/>
             </a:pPr>
             <a:r>
@@ -1664,7 +1444,7 @@
             <a:endParaRPr lang="en-US" sz="2300" dirty="0"/>
           </a:p>
           <a:p>
-            <a:pPr algn="ctr" indent="0" marL="0">
+            <a:pPr marL="0" indent="0" algn="ctr">
               <a:buNone/>
             </a:pPr>
             <a:r>
@@ -1678,7 +1458,7 @@
             <a:endParaRPr lang="en-US" sz="2300" dirty="0"/>
           </a:p>
           <a:p>
-            <a:pPr algn="ctr" indent="0" marL="0">
+            <a:pPr marL="0" indent="0" algn="ctr">
               <a:buNone/>
             </a:pPr>
             <a:r>
@@ -1692,7 +1472,7 @@
             <a:endParaRPr lang="en-US" sz="2300" dirty="0"/>
           </a:p>
           <a:p>
-            <a:pPr algn="ctr" indent="0" marL="0">
+            <a:pPr marL="0" indent="0" algn="ctr">
               <a:buNone/>
             </a:pPr>
             <a:r>
@@ -1706,7 +1486,7 @@
             <a:endParaRPr lang="en-US" sz="2300" dirty="0"/>
           </a:p>
           <a:p>
-            <a:pPr algn="ctr" indent="0" marL="0">
+            <a:pPr marL="0" indent="0" algn="ctr">
               <a:buNone/>
             </a:pPr>
             <a:r>
@@ -1737,6 +1517,7 @@
         <a:solidFill>
           <a:srgbClr val="F7F9FC"/>
         </a:solidFill>
+        <a:effectLst/>
       </p:bgPr>
     </p:bg>
     <p:spTree>
@@ -1774,7 +1555,7 @@
           <a:bodyPr wrap="square" lIns="0" tIns="0" rIns="0" bIns="0" rtlCol="0" anchor="ctr"/>
           <a:lstStyle/>
           <a:p>
-            <a:pPr indent="0" marL="0">
+            <a:pPr marL="0" indent="0">
               <a:buNone/>
             </a:pPr>
             <a:r>
@@ -1813,7 +1594,7 @@
           <a:bodyPr wrap="square" lIns="0" tIns="0" rIns="0" bIns="0" rtlCol="0" anchor="ctr"/>
           <a:lstStyle/>
           <a:p>
-            <a:pPr indent="0" marL="0">
+            <a:pPr marL="0" indent="0">
               <a:buNone/>
             </a:pPr>
             <a:r>
@@ -1850,6 +1631,13 @@
             <a:prstDash val="solid"/>
           </a:ln>
         </p:spPr>
+        <p:txBody>
+          <a:bodyPr/>
+          <a:lstStyle/>
+          <a:p>
+            <a:endParaRPr lang="en-US"/>
+          </a:p>
+        </p:txBody>
       </p:sp>
       <p:sp>
         <p:nvSpPr>
@@ -1877,13 +1665,20 @@
             <a:prstDash val="solid"/>
           </a:ln>
           <a:effectLst>
-            <a:outerShdw sx="100000" sy="100000" kx="0" ky="0" algn="bl" rotWithShape="0" blurRad="19050" dist="12700" dir="2700000">
+            <a:outerShdw blurRad="19050" dist="12700" dir="2700000" algn="bl" rotWithShape="0">
               <a:srgbClr val="000000">
                 <a:alpha val="13000"/>
               </a:srgbClr>
             </a:outerShdw>
           </a:effectLst>
         </p:spPr>
+        <p:txBody>
+          <a:bodyPr/>
+          <a:lstStyle/>
+          <a:p>
+            <a:endParaRPr lang="en-US"/>
+          </a:p>
+        </p:txBody>
       </p:sp>
       <p:sp>
         <p:nvSpPr>
@@ -1911,6 +1706,13 @@
             <a:prstDash val="solid"/>
           </a:ln>
         </p:spPr>
+        <p:txBody>
+          <a:bodyPr/>
+          <a:lstStyle/>
+          <a:p>
+            <a:endParaRPr lang="en-US"/>
+          </a:p>
+        </p:txBody>
       </p:sp>
       <p:sp>
         <p:nvSpPr>
@@ -1933,7 +1735,7 @@
           <a:bodyPr wrap="square" lIns="0" tIns="0" rIns="0" bIns="0" rtlCol="0" anchor="ctr"/>
           <a:lstStyle/>
           <a:p>
-            <a:pPr algn="ctr" indent="0" marL="0">
+            <a:pPr marL="0" indent="0" algn="ctr">
               <a:buNone/>
             </a:pPr>
             <a:r>
@@ -2041,13 +1843,20 @@
             <a:prstDash val="solid"/>
           </a:ln>
           <a:effectLst>
-            <a:outerShdw sx="100000" sy="100000" kx="0" ky="0" algn="bl" rotWithShape="0" blurRad="19050" dist="12700" dir="2700000">
+            <a:outerShdw blurRad="19050" dist="12700" dir="2700000" algn="bl" rotWithShape="0">
               <a:srgbClr val="000000">
                 <a:alpha val="13000"/>
               </a:srgbClr>
             </a:outerShdw>
           </a:effectLst>
         </p:spPr>
+        <p:txBody>
+          <a:bodyPr/>
+          <a:lstStyle/>
+          <a:p>
+            <a:endParaRPr lang="en-US"/>
+          </a:p>
+        </p:txBody>
       </p:sp>
       <p:sp>
         <p:nvSpPr>
@@ -2075,6 +1884,13 @@
             <a:prstDash val="solid"/>
           </a:ln>
         </p:spPr>
+        <p:txBody>
+          <a:bodyPr/>
+          <a:lstStyle/>
+          <a:p>
+            <a:endParaRPr lang="en-US"/>
+          </a:p>
+        </p:txBody>
       </p:sp>
       <p:sp>
         <p:nvSpPr>
@@ -2097,7 +1913,7 @@
           <a:bodyPr wrap="square" lIns="0" tIns="0" rIns="0" bIns="0" rtlCol="0" anchor="ctr"/>
           <a:lstStyle/>
           <a:p>
-            <a:pPr algn="ctr" indent="0" marL="0">
+            <a:pPr marL="0" indent="0" algn="ctr">
               <a:buNone/>
             </a:pPr>
             <a:r>
@@ -2205,13 +2021,20 @@
             <a:prstDash val="solid"/>
           </a:ln>
           <a:effectLst>
-            <a:outerShdw sx="100000" sy="100000" kx="0" ky="0" algn="bl" rotWithShape="0" blurRad="19050" dist="12700" dir="2700000">
+            <a:outerShdw blurRad="19050" dist="12700" dir="2700000" algn="bl" rotWithShape="0">
               <a:srgbClr val="000000">
                 <a:alpha val="13000"/>
               </a:srgbClr>
             </a:outerShdw>
           </a:effectLst>
         </p:spPr>
+        <p:txBody>
+          <a:bodyPr/>
+          <a:lstStyle/>
+          <a:p>
+            <a:endParaRPr lang="en-US"/>
+          </a:p>
+        </p:txBody>
       </p:sp>
       <p:sp>
         <p:nvSpPr>
@@ -2239,6 +2062,13 @@
             <a:prstDash val="solid"/>
           </a:ln>
         </p:spPr>
+        <p:txBody>
+          <a:bodyPr/>
+          <a:lstStyle/>
+          <a:p>
+            <a:endParaRPr lang="en-US"/>
+          </a:p>
+        </p:txBody>
       </p:sp>
       <p:sp>
         <p:nvSpPr>
@@ -2261,7 +2091,7 @@
           <a:bodyPr wrap="square" lIns="0" tIns="0" rIns="0" bIns="0" rtlCol="0" anchor="ctr"/>
           <a:lstStyle/>
           <a:p>
-            <a:pPr algn="ctr" indent="0" marL="0">
+            <a:pPr marL="0" indent="0" algn="ctr">
               <a:buNone/>
             </a:pPr>
             <a:r>
@@ -2364,7 +2194,7 @@
           <a:bodyPr wrap="square" rtlCol="0" anchor="ctr"/>
           <a:lstStyle/>
           <a:p>
-            <a:pPr algn="ctr" indent="0" marL="0">
+            <a:pPr marL="0" indent="0" algn="ctr">
               <a:buNone/>
             </a:pPr>
             <a:r>
@@ -2395,6 +2225,7 @@
         <a:solidFill>
           <a:srgbClr val="F7F9FC"/>
         </a:solidFill>
+        <a:effectLst/>
       </p:bgPr>
     </p:bg>
     <p:spTree>
@@ -2432,7 +2263,7 @@
           <a:bodyPr wrap="square" lIns="0" tIns="0" rIns="0" bIns="0" rtlCol="0" anchor="ctr"/>
           <a:lstStyle/>
           <a:p>
-            <a:pPr indent="0" marL="0">
+            <a:pPr marL="0" indent="0">
               <a:buNone/>
             </a:pPr>
             <a:r>
@@ -2471,7 +2302,7 @@
           <a:bodyPr wrap="square" lIns="0" tIns="0" rIns="0" bIns="0" rtlCol="0" anchor="ctr"/>
           <a:lstStyle/>
           <a:p>
-            <a:pPr indent="0" marL="0">
+            <a:pPr marL="0" indent="0">
               <a:buNone/>
             </a:pPr>
             <a:r>
@@ -2508,6 +2339,13 @@
             <a:prstDash val="solid"/>
           </a:ln>
         </p:spPr>
+        <p:txBody>
+          <a:bodyPr/>
+          <a:lstStyle/>
+          <a:p>
+            <a:endParaRPr lang="en-US"/>
+          </a:p>
+        </p:txBody>
       </p:sp>
       <p:sp>
         <p:nvSpPr>
@@ -2535,6 +2373,13 @@
             <a:prstDash val="solid"/>
           </a:ln>
         </p:spPr>
+        <p:txBody>
+          <a:bodyPr/>
+          <a:lstStyle/>
+          <a:p>
+            <a:endParaRPr lang="en-US"/>
+          </a:p>
+        </p:txBody>
       </p:sp>
       <p:sp>
         <p:nvSpPr>
@@ -2557,7 +2402,7 @@
           <a:bodyPr wrap="square" lIns="0" tIns="0" rIns="0" bIns="0" rtlCol="0" anchor="ctr"/>
           <a:lstStyle/>
           <a:p>
-            <a:pPr algn="ctr" indent="0" marL="0">
+            <a:pPr marL="0" indent="0" algn="ctr">
               <a:buNone/>
             </a:pPr>
             <a:r>
@@ -2593,7 +2438,7 @@
           <a:bodyPr wrap="square" lIns="508" tIns="508" rIns="508" bIns="508" rtlCol="0" anchor="ctr"/>
           <a:lstStyle/>
           <a:p>
-            <a:pPr algn="ctr" indent="0" marL="0">
+            <a:pPr marL="0" indent="0" algn="ctr">
               <a:buNone/>
             </a:pPr>
             <a:r>
@@ -2634,6 +2479,13 @@
             <a:prstDash val="solid"/>
           </a:ln>
         </p:spPr>
+        <p:txBody>
+          <a:bodyPr/>
+          <a:lstStyle/>
+          <a:p>
+            <a:endParaRPr lang="en-US"/>
+          </a:p>
+        </p:txBody>
       </p:sp>
       <p:sp>
         <p:nvSpPr>
@@ -2656,7 +2508,7 @@
           <a:bodyPr wrap="square" lIns="0" tIns="0" rIns="0" bIns="0" rtlCol="0" anchor="ctr"/>
           <a:lstStyle/>
           <a:p>
-            <a:pPr algn="ctr" indent="0" marL="0">
+            <a:pPr marL="0" indent="0" algn="ctr">
               <a:buNone/>
             </a:pPr>
             <a:r>
@@ -2692,7 +2544,7 @@
           <a:bodyPr wrap="square" lIns="508" tIns="508" rIns="508" bIns="508" rtlCol="0" anchor="ctr"/>
           <a:lstStyle/>
           <a:p>
-            <a:pPr algn="ctr" indent="0" marL="0">
+            <a:pPr marL="0" indent="0" algn="ctr">
               <a:buNone/>
             </a:pPr>
             <a:r>
@@ -2733,6 +2585,13 @@
             <a:prstDash val="solid"/>
           </a:ln>
         </p:spPr>
+        <p:txBody>
+          <a:bodyPr/>
+          <a:lstStyle/>
+          <a:p>
+            <a:endParaRPr lang="en-US"/>
+          </a:p>
+        </p:txBody>
       </p:sp>
       <p:sp>
         <p:nvSpPr>
@@ -2755,7 +2614,7 @@
           <a:bodyPr wrap="square" lIns="0" tIns="0" rIns="0" bIns="0" rtlCol="0" anchor="ctr"/>
           <a:lstStyle/>
           <a:p>
-            <a:pPr algn="ctr" indent="0" marL="0">
+            <a:pPr marL="0" indent="0" algn="ctr">
               <a:buNone/>
             </a:pPr>
             <a:r>
@@ -2791,7 +2650,7 @@
           <a:bodyPr wrap="square" lIns="508" tIns="508" rIns="508" bIns="508" rtlCol="0" anchor="ctr"/>
           <a:lstStyle/>
           <a:p>
-            <a:pPr algn="ctr" indent="0" marL="0">
+            <a:pPr marL="0" indent="0" algn="ctr">
               <a:buNone/>
             </a:pPr>
             <a:r>
@@ -2827,7 +2686,7 @@
           <a:bodyPr wrap="square" rtlCol="0" anchor="ctr"/>
           <a:lstStyle/>
           <a:p>
-            <a:pPr algn="ctr" indent="0" marL="0">
+            <a:pPr marL="0" indent="0" algn="ctr">
               <a:buNone/>
             </a:pPr>
             <a:r>
@@ -2863,7 +2722,7 @@
           <a:bodyPr wrap="square" rtlCol="0" anchor="ctr"/>
           <a:lstStyle/>
           <a:p>
-            <a:pPr algn="ctr" indent="0" marL="0">
+            <a:pPr marL="0" indent="0" algn="ctr">
               <a:buNone/>
             </a:pPr>
             <a:r>
@@ -2886,8 +2745,8 @@
         </p:nvSpPr>
         <p:spPr>
           <a:xfrm>
-            <a:off x="1097280" y="4389120"/>
-            <a:ext cx="9966960" cy="960120"/>
+            <a:off x="111890" y="4416127"/>
+            <a:ext cx="11871767" cy="912085"/>
           </a:xfrm>
           <a:prstGeom prst="roundRect">
             <a:avLst>
@@ -2904,6 +2763,13 @@
             <a:prstDash val="solid"/>
           </a:ln>
         </p:spPr>
+        <p:txBody>
+          <a:bodyPr/>
+          <a:lstStyle/>
+          <a:p>
+            <a:endParaRPr lang="en-US"/>
+          </a:p>
+        </p:txBody>
       </p:sp>
       <p:sp>
         <p:nvSpPr>
@@ -2913,8 +2779,8 @@
         </p:nvSpPr>
         <p:spPr>
           <a:xfrm>
-            <a:off x="1325880" y="4636008"/>
-            <a:ext cx="9509760" cy="347472"/>
+            <a:off x="0" y="4525701"/>
+            <a:ext cx="12080110" cy="457779"/>
           </a:xfrm>
           <a:prstGeom prst="rect">
             <a:avLst/>
@@ -2926,7 +2792,7 @@
           <a:bodyPr wrap="square" rtlCol="0" anchor="ctr"/>
           <a:lstStyle/>
           <a:p>
-            <a:pPr algn="ctr" indent="0" marL="0">
+            <a:pPr marL="0" indent="0" algn="ctr">
               <a:buNone/>
             </a:pPr>
             <a:r>
@@ -2957,6 +2823,7 @@
         <a:solidFill>
           <a:srgbClr val="F7F9FC"/>
         </a:solidFill>
+        <a:effectLst/>
       </p:bgPr>
     </p:bg>
     <p:spTree>
@@ -2994,7 +2861,7 @@
           <a:bodyPr wrap="square" lIns="0" tIns="0" rIns="0" bIns="0" rtlCol="0" anchor="ctr"/>
           <a:lstStyle/>
           <a:p>
-            <a:pPr indent="0" marL="0">
+            <a:pPr marL="0" indent="0">
               <a:buNone/>
             </a:pPr>
             <a:r>
@@ -3033,7 +2900,7 @@
           <a:bodyPr wrap="square" lIns="0" tIns="0" rIns="0" bIns="0" rtlCol="0" anchor="ctr"/>
           <a:lstStyle/>
           <a:p>
-            <a:pPr indent="0" marL="0">
+            <a:pPr marL="0" indent="0">
               <a:buNone/>
             </a:pPr>
             <a:r>
@@ -3070,6 +2937,13 @@
             <a:prstDash val="solid"/>
           </a:ln>
         </p:spPr>
+        <p:txBody>
+          <a:bodyPr/>
+          <a:lstStyle/>
+          <a:p>
+            <a:endParaRPr lang="en-US"/>
+          </a:p>
+        </p:txBody>
       </p:sp>
       <p:sp>
         <p:nvSpPr>
@@ -3097,13 +2971,20 @@
             <a:prstDash val="solid"/>
           </a:ln>
           <a:effectLst>
-            <a:outerShdw sx="100000" sy="100000" kx="0" ky="0" algn="bl" rotWithShape="0" blurRad="19050" dist="12700" dir="2700000">
+            <a:outerShdw blurRad="19050" dist="12700" dir="2700000" algn="bl" rotWithShape="0">
               <a:srgbClr val="000000">
                 <a:alpha val="13000"/>
               </a:srgbClr>
             </a:outerShdw>
           </a:effectLst>
         </p:spPr>
+        <p:txBody>
+          <a:bodyPr/>
+          <a:lstStyle/>
+          <a:p>
+            <a:endParaRPr lang="en-US"/>
+          </a:p>
+        </p:txBody>
       </p:sp>
       <p:sp>
         <p:nvSpPr>
@@ -3131,6 +3012,13 @@
             <a:prstDash val="solid"/>
           </a:ln>
         </p:spPr>
+        <p:txBody>
+          <a:bodyPr/>
+          <a:lstStyle/>
+          <a:p>
+            <a:endParaRPr lang="en-US"/>
+          </a:p>
+        </p:txBody>
       </p:sp>
       <p:sp>
         <p:nvSpPr>
@@ -3153,7 +3041,7 @@
           <a:bodyPr wrap="square" lIns="0" tIns="0" rIns="0" bIns="0" rtlCol="0" anchor="ctr"/>
           <a:lstStyle/>
           <a:p>
-            <a:pPr algn="ctr" indent="0" marL="0">
+            <a:pPr marL="0" indent="0" algn="ctr">
               <a:buNone/>
             </a:pPr>
             <a:r>
@@ -3306,13 +3194,20 @@
             <a:prstDash val="solid"/>
           </a:ln>
           <a:effectLst>
-            <a:outerShdw sx="100000" sy="100000" kx="0" ky="0" algn="bl" rotWithShape="0" blurRad="19050" dist="12700" dir="2700000">
+            <a:outerShdw blurRad="19050" dist="12700" dir="2700000" algn="bl" rotWithShape="0">
               <a:srgbClr val="000000">
                 <a:alpha val="13000"/>
               </a:srgbClr>
             </a:outerShdw>
           </a:effectLst>
         </p:spPr>
+        <p:txBody>
+          <a:bodyPr/>
+          <a:lstStyle/>
+          <a:p>
+            <a:endParaRPr lang="en-US"/>
+          </a:p>
+        </p:txBody>
       </p:sp>
       <p:sp>
         <p:nvSpPr>
@@ -3340,6 +3235,13 @@
             <a:prstDash val="solid"/>
           </a:ln>
         </p:spPr>
+        <p:txBody>
+          <a:bodyPr/>
+          <a:lstStyle/>
+          <a:p>
+            <a:endParaRPr lang="en-US"/>
+          </a:p>
+        </p:txBody>
       </p:sp>
       <p:sp>
         <p:nvSpPr>
@@ -3362,7 +3264,7 @@
           <a:bodyPr wrap="square" lIns="0" tIns="0" rIns="0" bIns="0" rtlCol="0" anchor="ctr"/>
           <a:lstStyle/>
           <a:p>
-            <a:pPr algn="ctr" indent="0" marL="0">
+            <a:pPr marL="0" indent="0" algn="ctr">
               <a:buNone/>
             </a:pPr>
             <a:r>
@@ -3482,8 +3384,8 @@
         </p:nvSpPr>
         <p:spPr>
           <a:xfrm>
-            <a:off x="914400" y="5303520"/>
-            <a:ext cx="10058400" cy="320040"/>
+            <a:off x="659757" y="5303519"/>
+            <a:ext cx="11150277" cy="595709"/>
           </a:xfrm>
           <a:prstGeom prst="rect">
             <a:avLst/>
@@ -3495,7 +3397,7 @@
           <a:bodyPr wrap="square" rtlCol="0" anchor="ctr"/>
           <a:lstStyle/>
           <a:p>
-            <a:pPr algn="ctr" indent="0" marL="0">
+            <a:pPr marL="0" indent="0" algn="ctr">
               <a:buNone/>
             </a:pPr>
             <a:r>
@@ -3526,6 +3428,7 @@
         <a:solidFill>
           <a:srgbClr val="F7F9FC"/>
         </a:solidFill>
+        <a:effectLst/>
       </p:bgPr>
     </p:bg>
     <p:spTree>
@@ -3563,7 +3466,7 @@
           <a:bodyPr wrap="square" lIns="0" tIns="0" rIns="0" bIns="0" rtlCol="0" anchor="ctr"/>
           <a:lstStyle/>
           <a:p>
-            <a:pPr indent="0" marL="0">
+            <a:pPr marL="0" indent="0">
               <a:buNone/>
             </a:pPr>
             <a:r>
@@ -3602,7 +3505,7 @@
           <a:bodyPr wrap="square" lIns="0" tIns="0" rIns="0" bIns="0" rtlCol="0" anchor="ctr"/>
           <a:lstStyle/>
           <a:p>
-            <a:pPr indent="0" marL="0">
+            <a:pPr marL="0" indent="0">
               <a:buNone/>
             </a:pPr>
             <a:r>
@@ -3639,6 +3542,13 @@
             <a:prstDash val="solid"/>
           </a:ln>
         </p:spPr>
+        <p:txBody>
+          <a:bodyPr/>
+          <a:lstStyle/>
+          <a:p>
+            <a:endParaRPr lang="en-US"/>
+          </a:p>
+        </p:txBody>
       </p:sp>
       <p:sp>
         <p:nvSpPr>
@@ -3666,13 +3576,20 @@
             <a:prstDash val="solid"/>
           </a:ln>
           <a:effectLst>
-            <a:outerShdw sx="100000" sy="100000" kx="0" ky="0" algn="bl" rotWithShape="0" blurRad="19050" dist="12700" dir="2700000">
+            <a:outerShdw blurRad="19050" dist="12700" dir="2700000" algn="bl" rotWithShape="0">
               <a:srgbClr val="000000">
                 <a:alpha val="13000"/>
               </a:srgbClr>
             </a:outerShdw>
           </a:effectLst>
         </p:spPr>
+        <p:txBody>
+          <a:bodyPr/>
+          <a:lstStyle/>
+          <a:p>
+            <a:endParaRPr lang="en-US"/>
+          </a:p>
+        </p:txBody>
       </p:sp>
       <p:sp>
         <p:nvSpPr>
@@ -3700,6 +3617,13 @@
             <a:prstDash val="solid"/>
           </a:ln>
         </p:spPr>
+        <p:txBody>
+          <a:bodyPr/>
+          <a:lstStyle/>
+          <a:p>
+            <a:endParaRPr lang="en-US"/>
+          </a:p>
+        </p:txBody>
       </p:sp>
       <p:sp>
         <p:nvSpPr>
@@ -3722,7 +3646,7 @@
           <a:bodyPr wrap="square" lIns="0" tIns="0" rIns="0" bIns="0" rtlCol="0" anchor="ctr"/>
           <a:lstStyle/>
           <a:p>
-            <a:pPr algn="ctr" indent="0" marL="0">
+            <a:pPr marL="0" indent="0" algn="ctr">
               <a:buNone/>
             </a:pPr>
             <a:r>
@@ -3830,13 +3754,20 @@
             <a:prstDash val="solid"/>
           </a:ln>
           <a:effectLst>
-            <a:outerShdw sx="100000" sy="100000" kx="0" ky="0" algn="bl" rotWithShape="0" blurRad="19050" dist="12700" dir="2700000">
+            <a:outerShdw blurRad="19050" dist="12700" dir="2700000" algn="bl" rotWithShape="0">
               <a:srgbClr val="000000">
                 <a:alpha val="13000"/>
               </a:srgbClr>
             </a:outerShdw>
           </a:effectLst>
         </p:spPr>
+        <p:txBody>
+          <a:bodyPr/>
+          <a:lstStyle/>
+          <a:p>
+            <a:endParaRPr lang="en-US"/>
+          </a:p>
+        </p:txBody>
       </p:sp>
       <p:sp>
         <p:nvSpPr>
@@ -3864,6 +3795,13 @@
             <a:prstDash val="solid"/>
           </a:ln>
         </p:spPr>
+        <p:txBody>
+          <a:bodyPr/>
+          <a:lstStyle/>
+          <a:p>
+            <a:endParaRPr lang="en-US"/>
+          </a:p>
+        </p:txBody>
       </p:sp>
       <p:sp>
         <p:nvSpPr>
@@ -3886,7 +3824,7 @@
           <a:bodyPr wrap="square" lIns="0" tIns="0" rIns="0" bIns="0" rtlCol="0" anchor="ctr"/>
           <a:lstStyle/>
           <a:p>
-            <a:pPr algn="ctr" indent="0" marL="0">
+            <a:pPr marL="0" indent="0" algn="ctr">
               <a:buNone/>
             </a:pPr>
             <a:r>
@@ -3994,13 +3932,20 @@
             <a:prstDash val="solid"/>
           </a:ln>
           <a:effectLst>
-            <a:outerShdw sx="100000" sy="100000" kx="0" ky="0" algn="bl" rotWithShape="0" blurRad="19050" dist="12700" dir="2700000">
+            <a:outerShdw blurRad="19050" dist="12700" dir="2700000" algn="bl" rotWithShape="0">
               <a:srgbClr val="000000">
                 <a:alpha val="13000"/>
               </a:srgbClr>
             </a:outerShdw>
           </a:effectLst>
         </p:spPr>
+        <p:txBody>
+          <a:bodyPr/>
+          <a:lstStyle/>
+          <a:p>
+            <a:endParaRPr lang="en-US"/>
+          </a:p>
+        </p:txBody>
       </p:sp>
       <p:sp>
         <p:nvSpPr>
@@ -4028,6 +3973,13 @@
             <a:prstDash val="solid"/>
           </a:ln>
         </p:spPr>
+        <p:txBody>
+          <a:bodyPr/>
+          <a:lstStyle/>
+          <a:p>
+            <a:endParaRPr lang="en-US"/>
+          </a:p>
+        </p:txBody>
       </p:sp>
       <p:sp>
         <p:nvSpPr>
@@ -4050,7 +4002,7 @@
           <a:bodyPr wrap="square" lIns="0" tIns="0" rIns="0" bIns="0" rtlCol="0" anchor="ctr"/>
           <a:lstStyle/>
           <a:p>
-            <a:pPr algn="ctr" indent="0" marL="0">
+            <a:pPr marL="0" indent="0" algn="ctr">
               <a:buNone/>
             </a:pPr>
             <a:r>
@@ -4153,7 +4105,7 @@
           <a:bodyPr wrap="square" rtlCol="0" anchor="ctr"/>
           <a:lstStyle/>
           <a:p>
-            <a:pPr algn="ctr" indent="0" marL="0">
+            <a:pPr marL="0" indent="0" algn="ctr">
               <a:buNone/>
             </a:pPr>
             <a:r>
@@ -4184,6 +4136,7 @@
         <a:solidFill>
           <a:srgbClr val="F7F9FC"/>
         </a:solidFill>
+        <a:effectLst/>
       </p:bgPr>
     </p:bg>
     <p:spTree>
@@ -4221,7 +4174,7 @@
           <a:bodyPr wrap="square" lIns="0" tIns="0" rIns="0" bIns="0" rtlCol="0" anchor="ctr"/>
           <a:lstStyle/>
           <a:p>
-            <a:pPr indent="0" marL="0">
+            <a:pPr marL="0" indent="0">
               <a:buNone/>
             </a:pPr>
             <a:r>
@@ -4260,7 +4213,7 @@
           <a:bodyPr wrap="square" lIns="0" tIns="0" rIns="0" bIns="0" rtlCol="0" anchor="ctr"/>
           <a:lstStyle/>
           <a:p>
-            <a:pPr indent="0" marL="0">
+            <a:pPr marL="0" indent="0">
               <a:buNone/>
             </a:pPr>
             <a:r>
@@ -4297,6 +4250,13 @@
             <a:prstDash val="solid"/>
           </a:ln>
         </p:spPr>
+        <p:txBody>
+          <a:bodyPr/>
+          <a:lstStyle/>
+          <a:p>
+            <a:endParaRPr lang="en-US"/>
+          </a:p>
+        </p:txBody>
       </p:sp>
       <p:sp>
         <p:nvSpPr>
@@ -4306,8 +4266,8 @@
         </p:nvSpPr>
         <p:spPr>
           <a:xfrm>
-            <a:off x="914400" y="1645920"/>
-            <a:ext cx="3840480" cy="411480"/>
+            <a:off x="609599" y="1780536"/>
+            <a:ext cx="5262623" cy="479951"/>
           </a:xfrm>
           <a:prstGeom prst="rect">
             <a:avLst/>
@@ -4319,7 +4279,7 @@
           <a:bodyPr wrap="square" rtlCol="0" anchor="ctr"/>
           <a:lstStyle/>
           <a:p>
-            <a:pPr indent="0" marL="0">
+            <a:pPr marL="0" indent="0">
               <a:buNone/>
             </a:pPr>
             <a:r>
@@ -4342,8 +4302,8 @@
         </p:nvSpPr>
         <p:spPr>
           <a:xfrm>
-            <a:off x="914400" y="2514600"/>
-            <a:ext cx="4572000" cy="411480"/>
+            <a:off x="609599" y="2849327"/>
+            <a:ext cx="5551990" cy="336624"/>
           </a:xfrm>
           <a:prstGeom prst="rect">
             <a:avLst/>
@@ -4355,7 +4315,7 @@
           <a:bodyPr wrap="square" rtlCol="0" anchor="ctr"/>
           <a:lstStyle/>
           <a:p>
-            <a:pPr indent="0" marL="0">
+            <a:pPr marL="0" indent="0">
               <a:buNone/>
             </a:pPr>
             <a:r>
@@ -4378,8 +4338,8 @@
         </p:nvSpPr>
         <p:spPr>
           <a:xfrm>
-            <a:off x="914400" y="3383280"/>
-            <a:ext cx="6492240" cy="411480"/>
+            <a:off x="416689" y="3469415"/>
+            <a:ext cx="8046720" cy="1060047"/>
           </a:xfrm>
           <a:prstGeom prst="rect">
             <a:avLst/>
@@ -4391,7 +4351,7 @@
           <a:bodyPr wrap="square" rtlCol="0" anchor="ctr"/>
           <a:lstStyle/>
           <a:p>
-            <a:pPr indent="0" marL="0">
+            <a:pPr marL="0" indent="0">
               <a:buNone/>
             </a:pPr>
             <a:r>
@@ -4414,8 +4374,8 @@
         </p:nvSpPr>
         <p:spPr>
           <a:xfrm>
-            <a:off x="7498080" y="1645920"/>
-            <a:ext cx="3474720" cy="2468880"/>
+            <a:off x="8168254" y="1692797"/>
+            <a:ext cx="3931149" cy="2148840"/>
           </a:xfrm>
           <a:prstGeom prst="roundRect">
             <a:avLst>
@@ -4432,13 +4392,20 @@
             <a:prstDash val="solid"/>
           </a:ln>
           <a:effectLst>
-            <a:outerShdw sx="100000" sy="100000" kx="0" ky="0" algn="bl" rotWithShape="0" blurRad="19050" dist="12700" dir="2700000">
+            <a:outerShdw blurRad="19050" dist="12700" dir="2700000" algn="bl" rotWithShape="0">
               <a:srgbClr val="000000">
                 <a:alpha val="12000"/>
               </a:srgbClr>
             </a:outerShdw>
           </a:effectLst>
         </p:spPr>
+        <p:txBody>
+          <a:bodyPr/>
+          <a:lstStyle/>
+          <a:p>
+            <a:endParaRPr lang="en-US"/>
+          </a:p>
+        </p:txBody>
       </p:sp>
       <p:sp>
         <p:nvSpPr>
@@ -4448,8 +4415,8 @@
         </p:nvSpPr>
         <p:spPr>
           <a:xfrm>
-            <a:off x="7772400" y="2103120"/>
-            <a:ext cx="2926080" cy="1371600"/>
+            <a:off x="7701023" y="2076015"/>
+            <a:ext cx="4965540" cy="1060048"/>
           </a:xfrm>
           <a:prstGeom prst="rect">
             <a:avLst/>
@@ -4461,7 +4428,7 @@
           <a:bodyPr wrap="square" rtlCol="0" anchor="ctr"/>
           <a:lstStyle/>
           <a:p>
-            <a:pPr algn="ctr" indent="0" marL="0">
+            <a:pPr marL="0" indent="0" algn="ctr">
               <a:buNone/>
             </a:pPr>
             <a:r>
@@ -4475,7 +4442,7 @@
             <a:endParaRPr lang="en-US" sz="2200" dirty="0"/>
           </a:p>
           <a:p>
-            <a:pPr algn="ctr" indent="0" marL="0">
+            <a:pPr marL="0" indent="0" algn="ctr">
               <a:buNone/>
             </a:pPr>
             <a:r>
@@ -4498,7 +4465,7 @@
         </p:nvSpPr>
         <p:spPr>
           <a:xfrm>
-            <a:off x="914400" y="4800600"/>
+            <a:off x="663615" y="4925029"/>
             <a:ext cx="10058400" cy="411480"/>
           </a:xfrm>
           <a:prstGeom prst="rect">
@@ -4511,7 +4478,7 @@
           <a:bodyPr wrap="square" rtlCol="0" anchor="ctr"/>
           <a:lstStyle/>
           <a:p>
-            <a:pPr algn="ctr" indent="0" marL="0">
+            <a:pPr marL="0" indent="0" algn="ctr">
               <a:buNone/>
             </a:pPr>
             <a:r>
@@ -4827,4 +4794,319 @@
     </a:ext>
   </a:extLst>
 </a:theme>
+</file>
+
+<file path=ppt/theme/theme2.xml><?xml version="1.0" encoding="utf-8"?>
+<a:theme xmlns:a="http://schemas.openxmlformats.org/drawingml/2006/main" name="Office Theme">
+  <a:themeElements>
+    <a:clrScheme name="Office">
+      <a:dk1>
+        <a:sysClr val="windowText" lastClr="000000"/>
+      </a:dk1>
+      <a:lt1>
+        <a:sysClr val="window" lastClr="FFFFFF"/>
+      </a:lt1>
+      <a:dk2>
+        <a:srgbClr val="0E2841"/>
+      </a:dk2>
+      <a:lt2>
+        <a:srgbClr val="E8E8E8"/>
+      </a:lt2>
+      <a:accent1>
+        <a:srgbClr val="156082"/>
+      </a:accent1>
+      <a:accent2>
+        <a:srgbClr val="E97132"/>
+      </a:accent2>
+      <a:accent3>
+        <a:srgbClr val="196B24"/>
+      </a:accent3>
+      <a:accent4>
+        <a:srgbClr val="0F9ED5"/>
+      </a:accent4>
+      <a:accent5>
+        <a:srgbClr val="A02B93"/>
+      </a:accent5>
+      <a:accent6>
+        <a:srgbClr val="4EA72E"/>
+      </a:accent6>
+      <a:hlink>
+        <a:srgbClr val="467886"/>
+      </a:hlink>
+      <a:folHlink>
+        <a:srgbClr val="96607D"/>
+      </a:folHlink>
+    </a:clrScheme>
+    <a:fontScheme name="Office">
+      <a:majorFont>
+        <a:latin typeface="Aptos Display" panose="02110004020202020204"/>
+        <a:ea typeface=""/>
+        <a:cs typeface=""/>
+        <a:font script="Jpan" typeface="游ゴシック Light"/>
+        <a:font script="Hang" typeface="맑은 고딕"/>
+        <a:font script="Hans" typeface="等线 Light"/>
+        <a:font script="Hant" typeface="新細明體"/>
+        <a:font script="Arab" typeface="Times New Roman"/>
+        <a:font script="Hebr" typeface="Times New Roman"/>
+        <a:font script="Thai" typeface="Angsana New"/>
+        <a:font script="Ethi" typeface="Nyala"/>
+        <a:font script="Beng" typeface="Vrinda"/>
+        <a:font script="Gujr" typeface="Shruti"/>
+        <a:font script="Khmr" typeface="MoolBoran"/>
+        <a:font script="Knda" typeface="Tunga"/>
+        <a:font script="Guru" typeface="Raavi"/>
+        <a:font script="Cans" typeface="Euphemia"/>
+        <a:font script="Cher" typeface="Plantagenet Cherokee"/>
+        <a:font script="Yiii" typeface="Microsoft Yi Baiti"/>
+        <a:font script="Tibt" typeface="Microsoft Himalaya"/>
+        <a:font script="Thaa" typeface="MV Boli"/>
+        <a:font script="Deva" typeface="Mangal"/>
+        <a:font script="Telu" typeface="Gautami"/>
+        <a:font script="Taml" typeface="Latha"/>
+        <a:font script="Syrc" typeface="Estrangelo Edessa"/>
+        <a:font script="Orya" typeface="Kalinga"/>
+        <a:font script="Mlym" typeface="Kartika"/>
+        <a:font script="Laoo" typeface="DokChampa"/>
+        <a:font script="Sinh" typeface="Iskoola Pota"/>
+        <a:font script="Mong" typeface="Mongolian Baiti"/>
+        <a:font script="Viet" typeface="Times New Roman"/>
+        <a:font script="Uigh" typeface="Microsoft Uighur"/>
+        <a:font script="Geor" typeface="Sylfaen"/>
+        <a:font script="Armn" typeface="Arial"/>
+        <a:font script="Bugi" typeface="Leelawadee UI"/>
+        <a:font script="Bopo" typeface="Microsoft JhengHei"/>
+        <a:font script="Java" typeface="Javanese Text"/>
+        <a:font script="Lisu" typeface="Segoe UI"/>
+        <a:font script="Mymr" typeface="Myanmar Text"/>
+        <a:font script="Nkoo" typeface="Ebrima"/>
+        <a:font script="Olck" typeface="Nirmala UI"/>
+        <a:font script="Osma" typeface="Ebrima"/>
+        <a:font script="Phag" typeface="Phagspa"/>
+        <a:font script="Syrn" typeface="Estrangelo Edessa"/>
+        <a:font script="Syrj" typeface="Estrangelo Edessa"/>
+        <a:font script="Syre" typeface="Estrangelo Edessa"/>
+        <a:font script="Sora" typeface="Nirmala UI"/>
+        <a:font script="Tale" typeface="Microsoft Tai Le"/>
+        <a:font script="Talu" typeface="Microsoft New Tai Lue"/>
+        <a:font script="Tfng" typeface="Ebrima"/>
+      </a:majorFont>
+      <a:minorFont>
+        <a:latin typeface="Aptos" panose="02110004020202020204"/>
+        <a:ea typeface=""/>
+        <a:cs typeface=""/>
+        <a:font script="Jpan" typeface="游ゴシック"/>
+        <a:font script="Hang" typeface="맑은 고딕"/>
+        <a:font script="Hans" typeface="等线"/>
+        <a:font script="Hant" typeface="新細明體"/>
+        <a:font script="Arab" typeface="Arial"/>
+        <a:font script="Hebr" typeface="Arial"/>
+        <a:font script="Thai" typeface="Cordia New"/>
+        <a:font script="Ethi" typeface="Nyala"/>
+        <a:font script="Beng" typeface="Vrinda"/>
+        <a:font script="Gujr" typeface="Shruti"/>
+        <a:font script="Khmr" typeface="DaunPenh"/>
+        <a:font script="Knda" typeface="Tunga"/>
+        <a:font script="Guru" typeface="Raavi"/>
+        <a:font script="Cans" typeface="Euphemia"/>
+        <a:font script="Cher" typeface="Plantagenet Cherokee"/>
+        <a:font script="Yiii" typeface="Microsoft Yi Baiti"/>
+        <a:font script="Tibt" typeface="Microsoft Himalaya"/>
+        <a:font script="Thaa" typeface="MV Boli"/>
+        <a:font script="Deva" typeface="Mangal"/>
+        <a:font script="Telu" typeface="Gautami"/>
+        <a:font script="Taml" typeface="Latha"/>
+        <a:font script="Syrc" typeface="Estrangelo Edessa"/>
+        <a:font script="Orya" typeface="Kalinga"/>
+        <a:font script="Mlym" typeface="Kartika"/>
+        <a:font script="Laoo" typeface="DokChampa"/>
+        <a:font script="Sinh" typeface="Iskoola Pota"/>
+        <a:font script="Mong" typeface="Mongolian Baiti"/>
+        <a:font script="Viet" typeface="Arial"/>
+        <a:font script="Uigh" typeface="Microsoft Uighur"/>
+        <a:font script="Geor" typeface="Sylfaen"/>
+        <a:font script="Armn" typeface="Arial"/>
+        <a:font script="Bugi" typeface="Leelawadee UI"/>
+        <a:font script="Bopo" typeface="Microsoft JhengHei"/>
+        <a:font script="Java" typeface="Javanese Text"/>
+        <a:font script="Lisu" typeface="Segoe UI"/>
+        <a:font script="Mymr" typeface="Myanmar Text"/>
+        <a:font script="Nkoo" typeface="Ebrima"/>
+        <a:font script="Olck" typeface="Nirmala UI"/>
+        <a:font script="Osma" typeface="Ebrima"/>
+        <a:font script="Phag" typeface="Phagspa"/>
+        <a:font script="Syrn" typeface="Estrangelo Edessa"/>
+        <a:font script="Syrj" typeface="Estrangelo Edessa"/>
+        <a:font script="Syre" typeface="Estrangelo Edessa"/>
+        <a:font script="Sora" typeface="Nirmala UI"/>
+        <a:font script="Tale" typeface="Microsoft Tai Le"/>
+        <a:font script="Talu" typeface="Microsoft New Tai Lue"/>
+        <a:font script="Tfng" typeface="Ebrima"/>
+      </a:minorFont>
+    </a:fontScheme>
+    <a:fmtScheme name="Office">
+      <a:fillStyleLst>
+        <a:solidFill>
+          <a:schemeClr val="phClr"/>
+        </a:solidFill>
+        <a:gradFill rotWithShape="1">
+          <a:gsLst>
+            <a:gs pos="0">
+              <a:schemeClr val="phClr">
+                <a:lumMod val="110000"/>
+                <a:satMod val="105000"/>
+                <a:tint val="67000"/>
+              </a:schemeClr>
+            </a:gs>
+            <a:gs pos="50000">
+              <a:schemeClr val="phClr">
+                <a:lumMod val="105000"/>
+                <a:satMod val="103000"/>
+                <a:tint val="73000"/>
+              </a:schemeClr>
+            </a:gs>
+            <a:gs pos="100000">
+              <a:schemeClr val="phClr">
+                <a:lumMod val="105000"/>
+                <a:satMod val="109000"/>
+                <a:tint val="81000"/>
+              </a:schemeClr>
+            </a:gs>
+          </a:gsLst>
+          <a:lin ang="5400000" scaled="0"/>
+        </a:gradFill>
+        <a:gradFill rotWithShape="1">
+          <a:gsLst>
+            <a:gs pos="0">
+              <a:schemeClr val="phClr">
+                <a:satMod val="103000"/>
+                <a:lumMod val="102000"/>
+                <a:tint val="94000"/>
+              </a:schemeClr>
+            </a:gs>
+            <a:gs pos="50000">
+              <a:schemeClr val="phClr">
+                <a:satMod val="110000"/>
+                <a:lumMod val="100000"/>
+                <a:shade val="100000"/>
+              </a:schemeClr>
+            </a:gs>
+            <a:gs pos="100000">
+              <a:schemeClr val="phClr">
+                <a:lumMod val="99000"/>
+                <a:satMod val="120000"/>
+                <a:shade val="78000"/>
+              </a:schemeClr>
+            </a:gs>
+          </a:gsLst>
+          <a:lin ang="5400000" scaled="0"/>
+        </a:gradFill>
+      </a:fillStyleLst>
+      <a:lnStyleLst>
+        <a:ln w="12700" cap="flat" cmpd="sng" algn="ctr">
+          <a:solidFill>
+            <a:schemeClr val="phClr"/>
+          </a:solidFill>
+          <a:prstDash val="solid"/>
+          <a:miter lim="800000"/>
+        </a:ln>
+        <a:ln w="19050" cap="flat" cmpd="sng" algn="ctr">
+          <a:solidFill>
+            <a:schemeClr val="phClr"/>
+          </a:solidFill>
+          <a:prstDash val="solid"/>
+          <a:miter lim="800000"/>
+        </a:ln>
+        <a:ln w="25400" cap="flat" cmpd="sng" algn="ctr">
+          <a:solidFill>
+            <a:schemeClr val="phClr"/>
+          </a:solidFill>
+          <a:prstDash val="solid"/>
+          <a:miter lim="800000"/>
+        </a:ln>
+      </a:lnStyleLst>
+      <a:effectStyleLst>
+        <a:effectStyle>
+          <a:effectLst/>
+        </a:effectStyle>
+        <a:effectStyle>
+          <a:effectLst/>
+        </a:effectStyle>
+        <a:effectStyle>
+          <a:effectLst>
+            <a:outerShdw blurRad="57150" dist="19050" dir="5400000" algn="ctr" rotWithShape="0">
+              <a:srgbClr val="000000">
+                <a:alpha val="63000"/>
+              </a:srgbClr>
+            </a:outerShdw>
+          </a:effectLst>
+        </a:effectStyle>
+      </a:effectStyleLst>
+      <a:bgFillStyleLst>
+        <a:solidFill>
+          <a:schemeClr val="phClr"/>
+        </a:solidFill>
+        <a:solidFill>
+          <a:schemeClr val="phClr">
+            <a:tint val="95000"/>
+            <a:satMod val="170000"/>
+          </a:schemeClr>
+        </a:solidFill>
+        <a:gradFill rotWithShape="1">
+          <a:gsLst>
+            <a:gs pos="0">
+              <a:schemeClr val="phClr">
+                <a:tint val="93000"/>
+                <a:satMod val="150000"/>
+                <a:shade val="98000"/>
+                <a:lumMod val="102000"/>
+              </a:schemeClr>
+            </a:gs>
+            <a:gs pos="50000">
+              <a:schemeClr val="phClr">
+                <a:tint val="98000"/>
+                <a:satMod val="130000"/>
+                <a:shade val="90000"/>
+                <a:lumMod val="103000"/>
+              </a:schemeClr>
+            </a:gs>
+            <a:gs pos="100000">
+              <a:schemeClr val="phClr">
+                <a:shade val="63000"/>
+                <a:satMod val="120000"/>
+              </a:schemeClr>
+            </a:gs>
+          </a:gsLst>
+          <a:lin ang="5400000" scaled="0"/>
+        </a:gradFill>
+      </a:bgFillStyleLst>
+    </a:fmtScheme>
+  </a:themeElements>
+  <a:objectDefaults>
+    <a:lnDef>
+      <a:spPr/>
+      <a:bodyPr/>
+      <a:lstStyle/>
+      <a:style>
+        <a:lnRef idx="2">
+          <a:schemeClr val="accent1"/>
+        </a:lnRef>
+        <a:fillRef idx="0">
+          <a:schemeClr val="accent1"/>
+        </a:fillRef>
+        <a:effectRef idx="1">
+          <a:schemeClr val="accent1"/>
+        </a:effectRef>
+        <a:fontRef idx="minor">
+          <a:schemeClr val="tx1"/>
+        </a:fontRef>
+      </a:style>
+    </a:lnDef>
+  </a:objectDefaults>
+  <a:extraClrSchemeLst/>
+  <a:extLst>
+    <a:ext uri="{05A4C25C-085E-4340-85A3-A5531E510DB2}">
+      <thm15:themeFamily xmlns:thm15="http://schemas.microsoft.com/office/thememl/2012/main" name="Office Theme" id="{2E142A2C-CD16-42D6-873A-C26D2A0506FA}" vid="{1BDDFF52-6CD6-40A5-AB3C-68EB2F1E4D0A}"/>
+    </a:ext>
+  </a:extLst>
+</a:theme>
 </file>